--- a/committenti/agritech/output/lezione-01-fondamenta-e-processi/Agritech_Lezione_1.pptx
+++ b/committenti/agritech/output/lezione-01-fondamenta-e-processi/Agritech_Lezione_1.pptx
@@ -3946,9 +3946,31 @@
           </a:p>
         </p:txBody>
       </p:sp>
+      <p:sp>
+        <p:nvSpPr>
+          <p:cNvPr id="5" name="Shape 3"/>
+          <p:cNvSpPr/>
+          <p:nvPr/>
+        </p:nvSpPr>
+        <p:spPr>
+          <a:xfrm>
+            <a:off x="952500" y="9391650"/>
+            <a:ext cx="1187797" cy="476250"/>
+          </a:xfrm>
+          <a:prstGeom prst="roundRect">
+            <a:avLst>
+              <a:gd name="adj" fmla="val 12000"/>
+            </a:avLst>
+          </a:prstGeom>
+          <a:solidFill>
+            <a:srgbClr val="FFFFFF"/>
+          </a:solidFill>
+          <a:ln/>
+        </p:spPr>
+      </p:sp>
       <p:pic>
         <p:nvPicPr>
-          <p:cNvPr id="5" name="Image 0" descr="preencoded.png">    </p:cNvPr>
+          <p:cNvPr id="6" name="Image 0" descr="preencoded.png">    </p:cNvPr>
           <p:cNvPicPr>
             <a:picLocks noChangeAspect="1"/>
           </p:cNvPicPr>
@@ -3962,60 +3984,14 @@
         </p:blipFill>
         <p:spPr>
           <a:xfrm>
-            <a:off x="952500" y="9448800"/>
-            <a:ext cx="534888" cy="419100"/>
+            <a:off x="1104900" y="9467850"/>
+            <a:ext cx="882997" cy="323850"/>
           </a:xfrm>
           <a:prstGeom prst="rect">
             <a:avLst/>
           </a:prstGeom>
         </p:spPr>
       </p:pic>
-      <p:sp>
-        <p:nvSpPr>
-          <p:cNvPr id="6" name="Text 3"/>
-          <p:cNvSpPr/>
-          <p:nvPr/>
-        </p:nvSpPr>
-        <p:spPr>
-          <a:xfrm>
-            <a:off x="1639788" y="9505950"/>
-            <a:ext cx="1988939" cy="342900"/>
-          </a:xfrm>
-          <a:prstGeom prst="rect">
-            <a:avLst/>
-          </a:prstGeom>
-          <a:noFill/>
-          <a:ln/>
-        </p:spPr>
-        <p:txBody>
-          <a:bodyPr wrap="square" lIns="25400" tIns="25400" rIns="25400" bIns="25400" rtlCol="0" anchor="t">
-            <a:normAutofit/>
-          </a:bodyPr>
-          <a:lstStyle/>
-          <a:p>
-            <a:pPr algn="l" indent="0" marL="0">
-              <a:lnSpc>
-                <a:spcPct val="139130"/>
-              </a:lnSpc>
-              <a:buNone/>
-            </a:pPr>
-            <a:r>
-              <a:rPr lang="en-US" sz="1500" b="1" dirty="0">
-                <a:solidFill>
-                  <a:srgbClr val="FFFFFF">
-                    <a:alpha val="65000"/>
-                  </a:srgbClr>
-                </a:solidFill>
-                <a:latin typeface="Arial" pitchFamily="34" charset="0"/>
-                <a:ea typeface="Arial" pitchFamily="34" charset="-122"/>
-                <a:cs typeface="Arial" pitchFamily="34" charset="-120"/>
-              </a:rPr>
-              <a:t>AFGP · Formazione AI</a:t>
-            </a:r>
-            <a:endParaRPr lang="en-US" sz="1500" dirty="0"/>
-          </a:p>
-        </p:txBody>
-      </p:sp>
       <p:sp>
         <p:nvSpPr>
           <p:cNvPr id="7" name="Shape 4"/>
@@ -4342,8 +4318,8 @@
         </p:blipFill>
         <p:spPr>
           <a:xfrm>
-            <a:off x="952500" y="9572625"/>
-            <a:ext cx="364778" cy="285750"/>
+            <a:off x="952500" y="9544050"/>
+            <a:ext cx="882997" cy="323850"/>
           </a:xfrm>
           <a:prstGeom prst="rect">
             <a:avLst/>
@@ -4353,50 +4329,6 @@
       <p:sp>
         <p:nvSpPr>
           <p:cNvPr id="7" name="Text 4"/>
-          <p:cNvSpPr/>
-          <p:nvPr/>
-        </p:nvSpPr>
-        <p:spPr>
-          <a:xfrm>
-            <a:off x="1469678" y="9563100"/>
-            <a:ext cx="1988939" cy="342900"/>
-          </a:xfrm>
-          <a:prstGeom prst="rect">
-            <a:avLst/>
-          </a:prstGeom>
-          <a:noFill/>
-          <a:ln/>
-        </p:spPr>
-        <p:txBody>
-          <a:bodyPr wrap="square" lIns="25400" tIns="25400" rIns="25400" bIns="25400" rtlCol="0" anchor="t">
-            <a:normAutofit/>
-          </a:bodyPr>
-          <a:lstStyle/>
-          <a:p>
-            <a:pPr algn="l" indent="0" marL="0">
-              <a:lnSpc>
-                <a:spcPct val="139130"/>
-              </a:lnSpc>
-              <a:buNone/>
-            </a:pPr>
-            <a:r>
-              <a:rPr lang="en-US" sz="1500" b="1" dirty="0">
-                <a:solidFill>
-                  <a:srgbClr val="6B7280"/>
-                </a:solidFill>
-                <a:latin typeface="Arial" pitchFamily="34" charset="0"/>
-                <a:ea typeface="Arial" pitchFamily="34" charset="-122"/>
-                <a:cs typeface="Arial" pitchFamily="34" charset="-120"/>
-              </a:rPr>
-              <a:t>AFGP · Formazione AI</a:t>
-            </a:r>
-            <a:endParaRPr lang="en-US" sz="1500" dirty="0"/>
-          </a:p>
-        </p:txBody>
-      </p:sp>
-      <p:sp>
-        <p:nvSpPr>
-          <p:cNvPr id="8" name="Text 5"/>
           <p:cNvSpPr/>
           <p:nvPr/>
         </p:nvSpPr>
@@ -4604,9 +4536,31 @@
           </a:p>
         </p:txBody>
       </p:sp>
+      <p:sp>
+        <p:nvSpPr>
+          <p:cNvPr id="5" name="Shape 3"/>
+          <p:cNvSpPr/>
+          <p:nvPr/>
+        </p:nvSpPr>
+        <p:spPr>
+          <a:xfrm>
+            <a:off x="952500" y="9429750"/>
+            <a:ext cx="1083915" cy="438150"/>
+          </a:xfrm>
+          <a:prstGeom prst="roundRect">
+            <a:avLst>
+              <a:gd name="adj" fmla="val 13043"/>
+            </a:avLst>
+          </a:prstGeom>
+          <a:solidFill>
+            <a:srgbClr val="FFFFFF"/>
+          </a:solidFill>
+          <a:ln/>
+        </p:spPr>
+      </p:sp>
       <p:pic>
         <p:nvPicPr>
-          <p:cNvPr id="5" name="Image 0" descr="preencoded.png">    </p:cNvPr>
+          <p:cNvPr id="6" name="Image 0" descr="preencoded.png">    </p:cNvPr>
           <p:cNvPicPr>
             <a:picLocks noChangeAspect="1"/>
           </p:cNvPicPr>
@@ -4620,60 +4574,14 @@
         </p:blipFill>
         <p:spPr>
           <a:xfrm>
-            <a:off x="952500" y="9486900"/>
-            <a:ext cx="486370" cy="381000"/>
+            <a:off x="1104900" y="9505950"/>
+            <a:ext cx="779115" cy="285750"/>
           </a:xfrm>
           <a:prstGeom prst="rect">
             <a:avLst/>
           </a:prstGeom>
         </p:spPr>
       </p:pic>
-      <p:sp>
-        <p:nvSpPr>
-          <p:cNvPr id="6" name="Text 3"/>
-          <p:cNvSpPr/>
-          <p:nvPr/>
-        </p:nvSpPr>
-        <p:spPr>
-          <a:xfrm>
-            <a:off x="1591270" y="9525000"/>
-            <a:ext cx="1988939" cy="342900"/>
-          </a:xfrm>
-          <a:prstGeom prst="rect">
-            <a:avLst/>
-          </a:prstGeom>
-          <a:noFill/>
-          <a:ln/>
-        </p:spPr>
-        <p:txBody>
-          <a:bodyPr wrap="square" lIns="25400" tIns="25400" rIns="25400" bIns="25400" rtlCol="0" anchor="t">
-            <a:normAutofit/>
-          </a:bodyPr>
-          <a:lstStyle/>
-          <a:p>
-            <a:pPr algn="l" indent="0" marL="0">
-              <a:lnSpc>
-                <a:spcPct val="139130"/>
-              </a:lnSpc>
-              <a:buNone/>
-            </a:pPr>
-            <a:r>
-              <a:rPr lang="en-US" sz="1500" b="1" dirty="0">
-                <a:solidFill>
-                  <a:srgbClr val="FFFFFF">
-                    <a:alpha val="65000"/>
-                  </a:srgbClr>
-                </a:solidFill>
-                <a:latin typeface="Arial" pitchFamily="34" charset="0"/>
-                <a:ea typeface="Arial" pitchFamily="34" charset="-122"/>
-                <a:cs typeface="Arial" pitchFamily="34" charset="-120"/>
-              </a:rPr>
-              <a:t>AFGP · Formazione AI</a:t>
-            </a:r>
-            <a:endParaRPr lang="en-US" sz="1500" dirty="0"/>
-          </a:p>
-        </p:txBody>
-      </p:sp>
       <p:sp>
         <p:nvSpPr>
           <p:cNvPr id="7" name="Text 4"/>
@@ -5186,8 +5094,8 @@
         </p:blipFill>
         <p:spPr>
           <a:xfrm>
-            <a:off x="952500" y="9572625"/>
-            <a:ext cx="364778" cy="285750"/>
+            <a:off x="952500" y="9544050"/>
+            <a:ext cx="882997" cy="323850"/>
           </a:xfrm>
           <a:prstGeom prst="rect">
             <a:avLst/>
@@ -5197,50 +5105,6 @@
       <p:sp>
         <p:nvSpPr>
           <p:cNvPr id="14" name="Text 11"/>
-          <p:cNvSpPr/>
-          <p:nvPr/>
-        </p:nvSpPr>
-        <p:spPr>
-          <a:xfrm>
-            <a:off x="1469678" y="9563100"/>
-            <a:ext cx="1988939" cy="342900"/>
-          </a:xfrm>
-          <a:prstGeom prst="rect">
-            <a:avLst/>
-          </a:prstGeom>
-          <a:noFill/>
-          <a:ln/>
-        </p:spPr>
-        <p:txBody>
-          <a:bodyPr wrap="square" lIns="25400" tIns="25400" rIns="25400" bIns="25400" rtlCol="0" anchor="t">
-            <a:normAutofit/>
-          </a:bodyPr>
-          <a:lstStyle/>
-          <a:p>
-            <a:pPr algn="l" indent="0" marL="0">
-              <a:lnSpc>
-                <a:spcPct val="139130"/>
-              </a:lnSpc>
-              <a:buNone/>
-            </a:pPr>
-            <a:r>
-              <a:rPr lang="en-US" sz="1500" b="1" dirty="0">
-                <a:solidFill>
-                  <a:srgbClr val="6B7280"/>
-                </a:solidFill>
-                <a:latin typeface="Arial" pitchFamily="34" charset="0"/>
-                <a:ea typeface="Arial" pitchFamily="34" charset="-122"/>
-                <a:cs typeface="Arial" pitchFamily="34" charset="-120"/>
-              </a:rPr>
-              <a:t>AFGP · Formazione AI</a:t>
-            </a:r>
-            <a:endParaRPr lang="en-US" sz="1500" dirty="0"/>
-          </a:p>
-        </p:txBody>
-      </p:sp>
-      <p:sp>
-        <p:nvSpPr>
-          <p:cNvPr id="15" name="Text 12"/>
           <p:cNvSpPr/>
           <p:nvPr/>
         </p:nvSpPr>
@@ -5878,8 +5742,8 @@
         </p:blipFill>
         <p:spPr>
           <a:xfrm>
-            <a:off x="952500" y="9572625"/>
-            <a:ext cx="364778" cy="285750"/>
+            <a:off x="952500" y="9544050"/>
+            <a:ext cx="882997" cy="323850"/>
           </a:xfrm>
           <a:prstGeom prst="rect">
             <a:avLst/>
@@ -5889,50 +5753,6 @@
       <p:sp>
         <p:nvSpPr>
           <p:cNvPr id="17" name="Text 14"/>
-          <p:cNvSpPr/>
-          <p:nvPr/>
-        </p:nvSpPr>
-        <p:spPr>
-          <a:xfrm>
-            <a:off x="1469678" y="9563100"/>
-            <a:ext cx="1988939" cy="342900"/>
-          </a:xfrm>
-          <a:prstGeom prst="rect">
-            <a:avLst/>
-          </a:prstGeom>
-          <a:noFill/>
-          <a:ln/>
-        </p:spPr>
-        <p:txBody>
-          <a:bodyPr wrap="square" lIns="25400" tIns="25400" rIns="25400" bIns="25400" rtlCol="0" anchor="t">
-            <a:normAutofit/>
-          </a:bodyPr>
-          <a:lstStyle/>
-          <a:p>
-            <a:pPr algn="l" indent="0" marL="0">
-              <a:lnSpc>
-                <a:spcPct val="139130"/>
-              </a:lnSpc>
-              <a:buNone/>
-            </a:pPr>
-            <a:r>
-              <a:rPr lang="en-US" sz="1500" b="1" dirty="0">
-                <a:solidFill>
-                  <a:srgbClr val="6B7280"/>
-                </a:solidFill>
-                <a:latin typeface="Arial" pitchFamily="34" charset="0"/>
-                <a:ea typeface="Arial" pitchFamily="34" charset="-122"/>
-                <a:cs typeface="Arial" pitchFamily="34" charset="-120"/>
-              </a:rPr>
-              <a:t>AFGP · Formazione AI</a:t>
-            </a:r>
-            <a:endParaRPr lang="en-US" sz="1500" dirty="0"/>
-          </a:p>
-        </p:txBody>
-      </p:sp>
-      <p:sp>
-        <p:nvSpPr>
-          <p:cNvPr id="18" name="Text 15"/>
           <p:cNvSpPr/>
           <p:nvPr/>
         </p:nvSpPr>
@@ -6654,8 +6474,8 @@
         </p:blipFill>
         <p:spPr>
           <a:xfrm>
-            <a:off x="952500" y="9572625"/>
-            <a:ext cx="364778" cy="285750"/>
+            <a:off x="952500" y="9544050"/>
+            <a:ext cx="882997" cy="323850"/>
           </a:xfrm>
           <a:prstGeom prst="rect">
             <a:avLst/>
@@ -6665,50 +6485,6 @@
       <p:sp>
         <p:nvSpPr>
           <p:cNvPr id="20" name="Text 17"/>
-          <p:cNvSpPr/>
-          <p:nvPr/>
-        </p:nvSpPr>
-        <p:spPr>
-          <a:xfrm>
-            <a:off x="1469678" y="9563100"/>
-            <a:ext cx="1988939" cy="342900"/>
-          </a:xfrm>
-          <a:prstGeom prst="rect">
-            <a:avLst/>
-          </a:prstGeom>
-          <a:noFill/>
-          <a:ln/>
-        </p:spPr>
-        <p:txBody>
-          <a:bodyPr wrap="square" lIns="25400" tIns="25400" rIns="25400" bIns="25400" rtlCol="0" anchor="t">
-            <a:normAutofit/>
-          </a:bodyPr>
-          <a:lstStyle/>
-          <a:p>
-            <a:pPr algn="l" indent="0" marL="0">
-              <a:lnSpc>
-                <a:spcPct val="139130"/>
-              </a:lnSpc>
-              <a:buNone/>
-            </a:pPr>
-            <a:r>
-              <a:rPr lang="en-US" sz="1500" b="1" dirty="0">
-                <a:solidFill>
-                  <a:srgbClr val="6B7280"/>
-                </a:solidFill>
-                <a:latin typeface="Arial" pitchFamily="34" charset="0"/>
-                <a:ea typeface="Arial" pitchFamily="34" charset="-122"/>
-                <a:cs typeface="Arial" pitchFamily="34" charset="-120"/>
-              </a:rPr>
-              <a:t>AFGP · Formazione AI</a:t>
-            </a:r>
-            <a:endParaRPr lang="en-US" sz="1500" dirty="0"/>
-          </a:p>
-        </p:txBody>
-      </p:sp>
-      <p:sp>
-        <p:nvSpPr>
-          <p:cNvPr id="21" name="Text 18"/>
           <p:cNvSpPr/>
           <p:nvPr/>
         </p:nvSpPr>
@@ -7094,8 +6870,8 @@
         </p:blipFill>
         <p:spPr>
           <a:xfrm>
-            <a:off x="952500" y="9572625"/>
-            <a:ext cx="364778" cy="285750"/>
+            <a:off x="952500" y="9544050"/>
+            <a:ext cx="882997" cy="323850"/>
           </a:xfrm>
           <a:prstGeom prst="rect">
             <a:avLst/>
@@ -7105,50 +6881,6 @@
       <p:sp>
         <p:nvSpPr>
           <p:cNvPr id="10" name="Text 7"/>
-          <p:cNvSpPr/>
-          <p:nvPr/>
-        </p:nvSpPr>
-        <p:spPr>
-          <a:xfrm>
-            <a:off x="1469678" y="9563100"/>
-            <a:ext cx="1988939" cy="342900"/>
-          </a:xfrm>
-          <a:prstGeom prst="rect">
-            <a:avLst/>
-          </a:prstGeom>
-          <a:noFill/>
-          <a:ln/>
-        </p:spPr>
-        <p:txBody>
-          <a:bodyPr wrap="square" lIns="25400" tIns="25400" rIns="25400" bIns="25400" rtlCol="0" anchor="t">
-            <a:normAutofit/>
-          </a:bodyPr>
-          <a:lstStyle/>
-          <a:p>
-            <a:pPr algn="l" indent="0" marL="0">
-              <a:lnSpc>
-                <a:spcPct val="139130"/>
-              </a:lnSpc>
-              <a:buNone/>
-            </a:pPr>
-            <a:r>
-              <a:rPr lang="en-US" sz="1500" b="1" dirty="0">
-                <a:solidFill>
-                  <a:srgbClr val="6B7280"/>
-                </a:solidFill>
-                <a:latin typeface="Arial" pitchFamily="34" charset="0"/>
-                <a:ea typeface="Arial" pitchFamily="34" charset="-122"/>
-                <a:cs typeface="Arial" pitchFamily="34" charset="-120"/>
-              </a:rPr>
-              <a:t>AFGP · Formazione AI</a:t>
-            </a:r>
-            <a:endParaRPr lang="en-US" sz="1500" dirty="0"/>
-          </a:p>
-        </p:txBody>
-      </p:sp>
-      <p:sp>
-        <p:nvSpPr>
-          <p:cNvPr id="11" name="Text 8"/>
           <p:cNvSpPr/>
           <p:nvPr/>
         </p:nvSpPr>
@@ -7766,8 +7498,8 @@
         </p:blipFill>
         <p:spPr>
           <a:xfrm>
-            <a:off x="952500" y="9572625"/>
-            <a:ext cx="364778" cy="285750"/>
+            <a:off x="952500" y="9544050"/>
+            <a:ext cx="882997" cy="323850"/>
           </a:xfrm>
           <a:prstGeom prst="rect">
             <a:avLst/>
@@ -7777,50 +7509,6 @@
       <p:sp>
         <p:nvSpPr>
           <p:cNvPr id="17" name="Text 14"/>
-          <p:cNvSpPr/>
-          <p:nvPr/>
-        </p:nvSpPr>
-        <p:spPr>
-          <a:xfrm>
-            <a:off x="1469678" y="9563100"/>
-            <a:ext cx="1988939" cy="342900"/>
-          </a:xfrm>
-          <a:prstGeom prst="rect">
-            <a:avLst/>
-          </a:prstGeom>
-          <a:noFill/>
-          <a:ln/>
-        </p:spPr>
-        <p:txBody>
-          <a:bodyPr wrap="square" lIns="25400" tIns="25400" rIns="25400" bIns="25400" rtlCol="0" anchor="t">
-            <a:normAutofit/>
-          </a:bodyPr>
-          <a:lstStyle/>
-          <a:p>
-            <a:pPr algn="l" indent="0" marL="0">
-              <a:lnSpc>
-                <a:spcPct val="139130"/>
-              </a:lnSpc>
-              <a:buNone/>
-            </a:pPr>
-            <a:r>
-              <a:rPr lang="en-US" sz="1500" b="1" dirty="0">
-                <a:solidFill>
-                  <a:srgbClr val="6B7280"/>
-                </a:solidFill>
-                <a:latin typeface="Arial" pitchFamily="34" charset="0"/>
-                <a:ea typeface="Arial" pitchFamily="34" charset="-122"/>
-                <a:cs typeface="Arial" pitchFamily="34" charset="-120"/>
-              </a:rPr>
-              <a:t>AFGP · Formazione AI</a:t>
-            </a:r>
-            <a:endParaRPr lang="en-US" sz="1500" dirty="0"/>
-          </a:p>
-        </p:txBody>
-      </p:sp>
-      <p:sp>
-        <p:nvSpPr>
-          <p:cNvPr id="18" name="Text 15"/>
           <p:cNvSpPr/>
           <p:nvPr/>
         </p:nvSpPr>
@@ -8234,9 +7922,31 @@
           </a:p>
         </p:txBody>
       </p:sp>
+      <p:sp>
+        <p:nvSpPr>
+          <p:cNvPr id="8" name="Shape 6"/>
+          <p:cNvSpPr/>
+          <p:nvPr/>
+        </p:nvSpPr>
+        <p:spPr>
+          <a:xfrm>
+            <a:off x="952500" y="9429750"/>
+            <a:ext cx="1083915" cy="438150"/>
+          </a:xfrm>
+          <a:prstGeom prst="roundRect">
+            <a:avLst>
+              <a:gd name="adj" fmla="val 13043"/>
+            </a:avLst>
+          </a:prstGeom>
+          <a:solidFill>
+            <a:srgbClr val="FFFFFF"/>
+          </a:solidFill>
+          <a:ln/>
+        </p:spPr>
+      </p:sp>
       <p:pic>
         <p:nvPicPr>
-          <p:cNvPr id="8" name="Image 0" descr="preencoded.png">    </p:cNvPr>
+          <p:cNvPr id="9" name="Image 0" descr="preencoded.png">    </p:cNvPr>
           <p:cNvPicPr>
             <a:picLocks noChangeAspect="1"/>
           </p:cNvPicPr>
@@ -8250,60 +7960,14 @@
         </p:blipFill>
         <p:spPr>
           <a:xfrm>
-            <a:off x="952500" y="9486900"/>
-            <a:ext cx="486370" cy="381000"/>
+            <a:off x="1104900" y="9505950"/>
+            <a:ext cx="779115" cy="285750"/>
           </a:xfrm>
           <a:prstGeom prst="rect">
             <a:avLst/>
           </a:prstGeom>
         </p:spPr>
       </p:pic>
-      <p:sp>
-        <p:nvSpPr>
-          <p:cNvPr id="9" name="Text 6"/>
-          <p:cNvSpPr/>
-          <p:nvPr/>
-        </p:nvSpPr>
-        <p:spPr>
-          <a:xfrm>
-            <a:off x="1591270" y="9525000"/>
-            <a:ext cx="1988939" cy="342900"/>
-          </a:xfrm>
-          <a:prstGeom prst="rect">
-            <a:avLst/>
-          </a:prstGeom>
-          <a:noFill/>
-          <a:ln/>
-        </p:spPr>
-        <p:txBody>
-          <a:bodyPr wrap="square" lIns="25400" tIns="25400" rIns="25400" bIns="25400" rtlCol="0" anchor="t">
-            <a:normAutofit/>
-          </a:bodyPr>
-          <a:lstStyle/>
-          <a:p>
-            <a:pPr algn="l" indent="0" marL="0">
-              <a:lnSpc>
-                <a:spcPct val="139130"/>
-              </a:lnSpc>
-              <a:buNone/>
-            </a:pPr>
-            <a:r>
-              <a:rPr lang="en-US" sz="1500" b="1" dirty="0">
-                <a:solidFill>
-                  <a:srgbClr val="FFFFFF">
-                    <a:alpha val="65000"/>
-                  </a:srgbClr>
-                </a:solidFill>
-                <a:latin typeface="Arial" pitchFamily="34" charset="0"/>
-                <a:ea typeface="Arial" pitchFamily="34" charset="-122"/>
-                <a:cs typeface="Arial" pitchFamily="34" charset="-120"/>
-              </a:rPr>
-              <a:t>AFGP · Formazione AI</a:t>
-            </a:r>
-            <a:endParaRPr lang="en-US" sz="1500" dirty="0"/>
-          </a:p>
-        </p:txBody>
-      </p:sp>
       <p:sp>
         <p:nvSpPr>
           <p:cNvPr id="10" name="Text 7"/>
@@ -8516,9 +8180,31 @@
           </a:p>
         </p:txBody>
       </p:sp>
+      <p:sp>
+        <p:nvSpPr>
+          <p:cNvPr id="5" name="Shape 3"/>
+          <p:cNvSpPr/>
+          <p:nvPr/>
+        </p:nvSpPr>
+        <p:spPr>
+          <a:xfrm>
+            <a:off x="952500" y="9391650"/>
+            <a:ext cx="1187797" cy="476250"/>
+          </a:xfrm>
+          <a:prstGeom prst="roundRect">
+            <a:avLst>
+              <a:gd name="adj" fmla="val 12000"/>
+            </a:avLst>
+          </a:prstGeom>
+          <a:solidFill>
+            <a:srgbClr val="FFFFFF"/>
+          </a:solidFill>
+          <a:ln/>
+        </p:spPr>
+      </p:sp>
       <p:pic>
         <p:nvPicPr>
-          <p:cNvPr id="5" name="Image 0" descr="preencoded.png">    </p:cNvPr>
+          <p:cNvPr id="6" name="Image 0" descr="preencoded.png">    </p:cNvPr>
           <p:cNvPicPr>
             <a:picLocks noChangeAspect="1"/>
           </p:cNvPicPr>
@@ -8532,60 +8218,14 @@
         </p:blipFill>
         <p:spPr>
           <a:xfrm>
-            <a:off x="952500" y="9448800"/>
-            <a:ext cx="534888" cy="419100"/>
+            <a:off x="1104900" y="9467850"/>
+            <a:ext cx="882997" cy="323850"/>
           </a:xfrm>
           <a:prstGeom prst="rect">
             <a:avLst/>
           </a:prstGeom>
         </p:spPr>
       </p:pic>
-      <p:sp>
-        <p:nvSpPr>
-          <p:cNvPr id="6" name="Text 3"/>
-          <p:cNvSpPr/>
-          <p:nvPr/>
-        </p:nvSpPr>
-        <p:spPr>
-          <a:xfrm>
-            <a:off x="1639788" y="9505950"/>
-            <a:ext cx="1988939" cy="342900"/>
-          </a:xfrm>
-          <a:prstGeom prst="rect">
-            <a:avLst/>
-          </a:prstGeom>
-          <a:noFill/>
-          <a:ln/>
-        </p:spPr>
-        <p:txBody>
-          <a:bodyPr wrap="square" lIns="25400" tIns="25400" rIns="25400" bIns="25400" rtlCol="0" anchor="t">
-            <a:normAutofit/>
-          </a:bodyPr>
-          <a:lstStyle/>
-          <a:p>
-            <a:pPr algn="l" indent="0" marL="0">
-              <a:lnSpc>
-                <a:spcPct val="139130"/>
-              </a:lnSpc>
-              <a:buNone/>
-            </a:pPr>
-            <a:r>
-              <a:rPr lang="en-US" sz="1500" b="1" dirty="0">
-                <a:solidFill>
-                  <a:srgbClr val="FFFFFF">
-                    <a:alpha val="65000"/>
-                  </a:srgbClr>
-                </a:solidFill>
-                <a:latin typeface="Arial" pitchFamily="34" charset="0"/>
-                <a:ea typeface="Arial" pitchFamily="34" charset="-122"/>
-                <a:cs typeface="Arial" pitchFamily="34" charset="-120"/>
-              </a:rPr>
-              <a:t>AFGP · Formazione AI</a:t>
-            </a:r>
-            <a:endParaRPr lang="en-US" sz="1500" dirty="0"/>
-          </a:p>
-        </p:txBody>
-      </p:sp>
       <p:sp>
         <p:nvSpPr>
           <p:cNvPr id="7" name="Text 4"/>
@@ -9416,8 +9056,8 @@
         </p:blipFill>
         <p:spPr>
           <a:xfrm>
-            <a:off x="952500" y="9572625"/>
-            <a:ext cx="364778" cy="285750"/>
+            <a:off x="952500" y="9544050"/>
+            <a:ext cx="882997" cy="323850"/>
           </a:xfrm>
           <a:prstGeom prst="rect">
             <a:avLst/>
@@ -9427,50 +9067,6 @@
       <p:sp>
         <p:nvSpPr>
           <p:cNvPr id="23" name="Text 20"/>
-          <p:cNvSpPr/>
-          <p:nvPr/>
-        </p:nvSpPr>
-        <p:spPr>
-          <a:xfrm>
-            <a:off x="1469678" y="9563100"/>
-            <a:ext cx="1988939" cy="342900"/>
-          </a:xfrm>
-          <a:prstGeom prst="rect">
-            <a:avLst/>
-          </a:prstGeom>
-          <a:noFill/>
-          <a:ln/>
-        </p:spPr>
-        <p:txBody>
-          <a:bodyPr wrap="square" lIns="25400" tIns="25400" rIns="25400" bIns="25400" rtlCol="0" anchor="t">
-            <a:normAutofit/>
-          </a:bodyPr>
-          <a:lstStyle/>
-          <a:p>
-            <a:pPr algn="l" indent="0" marL="0">
-              <a:lnSpc>
-                <a:spcPct val="139130"/>
-              </a:lnSpc>
-              <a:buNone/>
-            </a:pPr>
-            <a:r>
-              <a:rPr lang="en-US" sz="1500" b="1" dirty="0">
-                <a:solidFill>
-                  <a:srgbClr val="6B7280"/>
-                </a:solidFill>
-                <a:latin typeface="Arial" pitchFamily="34" charset="0"/>
-                <a:ea typeface="Arial" pitchFamily="34" charset="-122"/>
-                <a:cs typeface="Arial" pitchFamily="34" charset="-120"/>
-              </a:rPr>
-              <a:t>AFGP · Formazione AI</a:t>
-            </a:r>
-            <a:endParaRPr lang="en-US" sz="1500" dirty="0"/>
-          </a:p>
-        </p:txBody>
-      </p:sp>
-      <p:sp>
-        <p:nvSpPr>
-          <p:cNvPr id="24" name="Text 21"/>
           <p:cNvSpPr/>
           <p:nvPr/>
         </p:nvSpPr>
@@ -10000,8 +9596,8 @@
         </p:blipFill>
         <p:spPr>
           <a:xfrm>
-            <a:off x="952500" y="9572625"/>
-            <a:ext cx="364778" cy="285750"/>
+            <a:off x="952500" y="9544050"/>
+            <a:ext cx="882997" cy="323850"/>
           </a:xfrm>
           <a:prstGeom prst="rect">
             <a:avLst/>
@@ -10011,50 +9607,6 @@
       <p:sp>
         <p:nvSpPr>
           <p:cNvPr id="13" name="Text 10"/>
-          <p:cNvSpPr/>
-          <p:nvPr/>
-        </p:nvSpPr>
-        <p:spPr>
-          <a:xfrm>
-            <a:off x="1469678" y="9563100"/>
-            <a:ext cx="1988939" cy="342900"/>
-          </a:xfrm>
-          <a:prstGeom prst="rect">
-            <a:avLst/>
-          </a:prstGeom>
-          <a:noFill/>
-          <a:ln/>
-        </p:spPr>
-        <p:txBody>
-          <a:bodyPr wrap="square" lIns="25400" tIns="25400" rIns="25400" bIns="25400" rtlCol="0" anchor="t">
-            <a:normAutofit/>
-          </a:bodyPr>
-          <a:lstStyle/>
-          <a:p>
-            <a:pPr algn="l" indent="0" marL="0">
-              <a:lnSpc>
-                <a:spcPct val="139130"/>
-              </a:lnSpc>
-              <a:buNone/>
-            </a:pPr>
-            <a:r>
-              <a:rPr lang="en-US" sz="1500" b="1" dirty="0">
-                <a:solidFill>
-                  <a:srgbClr val="6B7280"/>
-                </a:solidFill>
-                <a:latin typeface="Arial" pitchFamily="34" charset="0"/>
-                <a:ea typeface="Arial" pitchFamily="34" charset="-122"/>
-                <a:cs typeface="Arial" pitchFamily="34" charset="-120"/>
-              </a:rPr>
-              <a:t>AFGP · Formazione AI</a:t>
-            </a:r>
-            <a:endParaRPr lang="en-US" sz="1500" dirty="0"/>
-          </a:p>
-        </p:txBody>
-      </p:sp>
-      <p:sp>
-        <p:nvSpPr>
-          <p:cNvPr id="14" name="Text 11"/>
           <p:cNvSpPr/>
           <p:nvPr/>
         </p:nvSpPr>
@@ -10694,8 +10246,8 @@
         </p:blipFill>
         <p:spPr>
           <a:xfrm>
-            <a:off x="952500" y="9572625"/>
-            <a:ext cx="364778" cy="285750"/>
+            <a:off x="952500" y="9544050"/>
+            <a:ext cx="882997" cy="323850"/>
           </a:xfrm>
           <a:prstGeom prst="rect">
             <a:avLst/>
@@ -10705,50 +10257,6 @@
       <p:sp>
         <p:nvSpPr>
           <p:cNvPr id="17" name="Text 14"/>
-          <p:cNvSpPr/>
-          <p:nvPr/>
-        </p:nvSpPr>
-        <p:spPr>
-          <a:xfrm>
-            <a:off x="1469678" y="9563100"/>
-            <a:ext cx="1988939" cy="342900"/>
-          </a:xfrm>
-          <a:prstGeom prst="rect">
-            <a:avLst/>
-          </a:prstGeom>
-          <a:noFill/>
-          <a:ln/>
-        </p:spPr>
-        <p:txBody>
-          <a:bodyPr wrap="square" lIns="25400" tIns="25400" rIns="25400" bIns="25400" rtlCol="0" anchor="t">
-            <a:normAutofit/>
-          </a:bodyPr>
-          <a:lstStyle/>
-          <a:p>
-            <a:pPr algn="l" indent="0" marL="0">
-              <a:lnSpc>
-                <a:spcPct val="139130"/>
-              </a:lnSpc>
-              <a:buNone/>
-            </a:pPr>
-            <a:r>
-              <a:rPr lang="en-US" sz="1500" b="1" dirty="0">
-                <a:solidFill>
-                  <a:srgbClr val="6B7280"/>
-                </a:solidFill>
-                <a:latin typeface="Arial" pitchFamily="34" charset="0"/>
-                <a:ea typeface="Arial" pitchFamily="34" charset="-122"/>
-                <a:cs typeface="Arial" pitchFamily="34" charset="-120"/>
-              </a:rPr>
-              <a:t>AFGP · Formazione AI</a:t>
-            </a:r>
-            <a:endParaRPr lang="en-US" sz="1500" dirty="0"/>
-          </a:p>
-        </p:txBody>
-      </p:sp>
-      <p:sp>
-        <p:nvSpPr>
-          <p:cNvPr id="18" name="Text 15"/>
           <p:cNvSpPr/>
           <p:nvPr/>
         </p:nvSpPr>
@@ -11256,8 +10764,8 @@
         </p:blipFill>
         <p:spPr>
           <a:xfrm>
-            <a:off x="952500" y="9572625"/>
-            <a:ext cx="364778" cy="285750"/>
+            <a:off x="952500" y="9544050"/>
+            <a:ext cx="882997" cy="323850"/>
           </a:xfrm>
           <a:prstGeom prst="rect">
             <a:avLst/>
@@ -11267,50 +10775,6 @@
       <p:sp>
         <p:nvSpPr>
           <p:cNvPr id="14" name="Text 11"/>
-          <p:cNvSpPr/>
-          <p:nvPr/>
-        </p:nvSpPr>
-        <p:spPr>
-          <a:xfrm>
-            <a:off x="1469678" y="9563100"/>
-            <a:ext cx="1988939" cy="342900"/>
-          </a:xfrm>
-          <a:prstGeom prst="rect">
-            <a:avLst/>
-          </a:prstGeom>
-          <a:noFill/>
-          <a:ln/>
-        </p:spPr>
-        <p:txBody>
-          <a:bodyPr wrap="square" lIns="25400" tIns="25400" rIns="25400" bIns="25400" rtlCol="0" anchor="t">
-            <a:normAutofit/>
-          </a:bodyPr>
-          <a:lstStyle/>
-          <a:p>
-            <a:pPr algn="l" indent="0" marL="0">
-              <a:lnSpc>
-                <a:spcPct val="139130"/>
-              </a:lnSpc>
-              <a:buNone/>
-            </a:pPr>
-            <a:r>
-              <a:rPr lang="en-US" sz="1500" b="1" dirty="0">
-                <a:solidFill>
-                  <a:srgbClr val="6B7280"/>
-                </a:solidFill>
-                <a:latin typeface="Arial" pitchFamily="34" charset="0"/>
-                <a:ea typeface="Arial" pitchFamily="34" charset="-122"/>
-                <a:cs typeface="Arial" pitchFamily="34" charset="-120"/>
-              </a:rPr>
-              <a:t>AFGP · Formazione AI</a:t>
-            </a:r>
-            <a:endParaRPr lang="en-US" sz="1500" dirty="0"/>
-          </a:p>
-        </p:txBody>
-      </p:sp>
-      <p:sp>
-        <p:nvSpPr>
-          <p:cNvPr id="15" name="Text 12"/>
           <p:cNvSpPr/>
           <p:nvPr/>
         </p:nvSpPr>
@@ -12302,8 +11766,8 @@
         </p:blipFill>
         <p:spPr>
           <a:xfrm>
-            <a:off x="952500" y="9572625"/>
-            <a:ext cx="364778" cy="285750"/>
+            <a:off x="952500" y="9544050"/>
+            <a:ext cx="882997" cy="323850"/>
           </a:xfrm>
           <a:prstGeom prst="rect">
             <a:avLst/>
@@ -12313,50 +11777,6 @@
       <p:sp>
         <p:nvSpPr>
           <p:cNvPr id="26" name="Text 23"/>
-          <p:cNvSpPr/>
-          <p:nvPr/>
-        </p:nvSpPr>
-        <p:spPr>
-          <a:xfrm>
-            <a:off x="1469678" y="9563100"/>
-            <a:ext cx="1988939" cy="342900"/>
-          </a:xfrm>
-          <a:prstGeom prst="rect">
-            <a:avLst/>
-          </a:prstGeom>
-          <a:noFill/>
-          <a:ln/>
-        </p:spPr>
-        <p:txBody>
-          <a:bodyPr wrap="square" lIns="25400" tIns="25400" rIns="25400" bIns="25400" rtlCol="0" anchor="t">
-            <a:normAutofit/>
-          </a:bodyPr>
-          <a:lstStyle/>
-          <a:p>
-            <a:pPr algn="l" indent="0" marL="0">
-              <a:lnSpc>
-                <a:spcPct val="139130"/>
-              </a:lnSpc>
-              <a:buNone/>
-            </a:pPr>
-            <a:r>
-              <a:rPr lang="en-US" sz="1500" b="1" dirty="0">
-                <a:solidFill>
-                  <a:srgbClr val="6B7280"/>
-                </a:solidFill>
-                <a:latin typeface="Arial" pitchFamily="34" charset="0"/>
-                <a:ea typeface="Arial" pitchFamily="34" charset="-122"/>
-                <a:cs typeface="Arial" pitchFamily="34" charset="-120"/>
-              </a:rPr>
-              <a:t>AFGP · Formazione AI</a:t>
-            </a:r>
-            <a:endParaRPr lang="en-US" sz="1500" dirty="0"/>
-          </a:p>
-        </p:txBody>
-      </p:sp>
-      <p:sp>
-        <p:nvSpPr>
-          <p:cNvPr id="27" name="Text 24"/>
           <p:cNvSpPr/>
           <p:nvPr/>
         </p:nvSpPr>
@@ -12968,8 +12388,8 @@
         </p:blipFill>
         <p:spPr>
           <a:xfrm>
-            <a:off x="952500" y="9572625"/>
-            <a:ext cx="364778" cy="285750"/>
+            <a:off x="952500" y="9544050"/>
+            <a:ext cx="882997" cy="323850"/>
           </a:xfrm>
           <a:prstGeom prst="rect">
             <a:avLst/>
@@ -12979,50 +12399,6 @@
       <p:sp>
         <p:nvSpPr>
           <p:cNvPr id="17" name="Text 14"/>
-          <p:cNvSpPr/>
-          <p:nvPr/>
-        </p:nvSpPr>
-        <p:spPr>
-          <a:xfrm>
-            <a:off x="1469678" y="9563100"/>
-            <a:ext cx="1988939" cy="342900"/>
-          </a:xfrm>
-          <a:prstGeom prst="rect">
-            <a:avLst/>
-          </a:prstGeom>
-          <a:noFill/>
-          <a:ln/>
-        </p:spPr>
-        <p:txBody>
-          <a:bodyPr wrap="square" lIns="25400" tIns="25400" rIns="25400" bIns="25400" rtlCol="0" anchor="t">
-            <a:normAutofit/>
-          </a:bodyPr>
-          <a:lstStyle/>
-          <a:p>
-            <a:pPr algn="l" indent="0" marL="0">
-              <a:lnSpc>
-                <a:spcPct val="139130"/>
-              </a:lnSpc>
-              <a:buNone/>
-            </a:pPr>
-            <a:r>
-              <a:rPr lang="en-US" sz="1500" b="1" dirty="0">
-                <a:solidFill>
-                  <a:srgbClr val="6B7280"/>
-                </a:solidFill>
-                <a:latin typeface="Arial" pitchFamily="34" charset="0"/>
-                <a:ea typeface="Arial" pitchFamily="34" charset="-122"/>
-                <a:cs typeface="Arial" pitchFamily="34" charset="-120"/>
-              </a:rPr>
-              <a:t>AFGP · Formazione AI</a:t>
-            </a:r>
-            <a:endParaRPr lang="en-US" sz="1500" dirty="0"/>
-          </a:p>
-        </p:txBody>
-      </p:sp>
-      <p:sp>
-        <p:nvSpPr>
-          <p:cNvPr id="18" name="Text 15"/>
           <p:cNvSpPr/>
           <p:nvPr/>
         </p:nvSpPr>
@@ -13609,8 +12985,8 @@
         </p:blipFill>
         <p:spPr>
           <a:xfrm>
-            <a:off x="952500" y="9572625"/>
-            <a:ext cx="364778" cy="285750"/>
+            <a:off x="952500" y="9544050"/>
+            <a:ext cx="882997" cy="323850"/>
           </a:xfrm>
           <a:prstGeom prst="rect">
             <a:avLst/>
@@ -13620,50 +12996,6 @@
       <p:sp>
         <p:nvSpPr>
           <p:cNvPr id="16" name="Text 12"/>
-          <p:cNvSpPr/>
-          <p:nvPr/>
-        </p:nvSpPr>
-        <p:spPr>
-          <a:xfrm>
-            <a:off x="1469678" y="9563100"/>
-            <a:ext cx="1988939" cy="342900"/>
-          </a:xfrm>
-          <a:prstGeom prst="rect">
-            <a:avLst/>
-          </a:prstGeom>
-          <a:noFill/>
-          <a:ln/>
-        </p:spPr>
-        <p:txBody>
-          <a:bodyPr wrap="square" lIns="25400" tIns="25400" rIns="25400" bIns="25400" rtlCol="0" anchor="t">
-            <a:normAutofit/>
-          </a:bodyPr>
-          <a:lstStyle/>
-          <a:p>
-            <a:pPr algn="l" indent="0" marL="0">
-              <a:lnSpc>
-                <a:spcPct val="139130"/>
-              </a:lnSpc>
-              <a:buNone/>
-            </a:pPr>
-            <a:r>
-              <a:rPr lang="en-US" sz="1500" b="1" dirty="0">
-                <a:solidFill>
-                  <a:srgbClr val="6B7280"/>
-                </a:solidFill>
-                <a:latin typeface="Arial" pitchFamily="34" charset="0"/>
-                <a:ea typeface="Arial" pitchFamily="34" charset="-122"/>
-                <a:cs typeface="Arial" pitchFamily="34" charset="-120"/>
-              </a:rPr>
-              <a:t>AFGP · Formazione AI</a:t>
-            </a:r>
-            <a:endParaRPr lang="en-US" sz="1500" dirty="0"/>
-          </a:p>
-        </p:txBody>
-      </p:sp>
-      <p:sp>
-        <p:nvSpPr>
-          <p:cNvPr id="17" name="Text 13"/>
           <p:cNvSpPr/>
           <p:nvPr/>
         </p:nvSpPr>
@@ -14227,9 +13559,31 @@
           </a:p>
         </p:txBody>
       </p:sp>
+      <p:sp>
+        <p:nvSpPr>
+          <p:cNvPr id="13" name="Shape 11"/>
+          <p:cNvSpPr/>
+          <p:nvPr/>
+        </p:nvSpPr>
+        <p:spPr>
+          <a:xfrm>
+            <a:off x="952500" y="9429750"/>
+            <a:ext cx="1083915" cy="438150"/>
+          </a:xfrm>
+          <a:prstGeom prst="roundRect">
+            <a:avLst>
+              <a:gd name="adj" fmla="val 13043"/>
+            </a:avLst>
+          </a:prstGeom>
+          <a:solidFill>
+            <a:srgbClr val="FFFFFF"/>
+          </a:solidFill>
+          <a:ln/>
+        </p:spPr>
+      </p:sp>
       <p:pic>
         <p:nvPicPr>
-          <p:cNvPr id="13" name="Image 0" descr="preencoded.png">    </p:cNvPr>
+          <p:cNvPr id="14" name="Image 0" descr="preencoded.png">    </p:cNvPr>
           <p:cNvPicPr>
             <a:picLocks noChangeAspect="1"/>
           </p:cNvPicPr>
@@ -14243,60 +13597,14 @@
         </p:blipFill>
         <p:spPr>
           <a:xfrm>
-            <a:off x="952500" y="9486900"/>
-            <a:ext cx="486370" cy="381000"/>
+            <a:off x="1104900" y="9505950"/>
+            <a:ext cx="779115" cy="285750"/>
           </a:xfrm>
           <a:prstGeom prst="rect">
             <a:avLst/>
           </a:prstGeom>
         </p:spPr>
       </p:pic>
-      <p:sp>
-        <p:nvSpPr>
-          <p:cNvPr id="14" name="Text 11"/>
-          <p:cNvSpPr/>
-          <p:nvPr/>
-        </p:nvSpPr>
-        <p:spPr>
-          <a:xfrm>
-            <a:off x="1591270" y="9525000"/>
-            <a:ext cx="1988939" cy="342900"/>
-          </a:xfrm>
-          <a:prstGeom prst="rect">
-            <a:avLst/>
-          </a:prstGeom>
-          <a:noFill/>
-          <a:ln/>
-        </p:spPr>
-        <p:txBody>
-          <a:bodyPr wrap="square" lIns="25400" tIns="25400" rIns="25400" bIns="25400" rtlCol="0" anchor="t">
-            <a:normAutofit/>
-          </a:bodyPr>
-          <a:lstStyle/>
-          <a:p>
-            <a:pPr algn="l" indent="0" marL="0">
-              <a:lnSpc>
-                <a:spcPct val="139130"/>
-              </a:lnSpc>
-              <a:buNone/>
-            </a:pPr>
-            <a:r>
-              <a:rPr lang="en-US" sz="1500" b="1" dirty="0">
-                <a:solidFill>
-                  <a:srgbClr val="FFFFFF">
-                    <a:alpha val="65000"/>
-                  </a:srgbClr>
-                </a:solidFill>
-                <a:latin typeface="Arial" pitchFamily="34" charset="0"/>
-                <a:ea typeface="Arial" pitchFamily="34" charset="-122"/>
-                <a:cs typeface="Arial" pitchFamily="34" charset="-120"/>
-              </a:rPr>
-              <a:t>AFGP · Formazione AI</a:t>
-            </a:r>
-            <a:endParaRPr lang="en-US" sz="1500" dirty="0"/>
-          </a:p>
-        </p:txBody>
-      </p:sp>
       <p:sp>
         <p:nvSpPr>
           <p:cNvPr id="15" name="Text 12"/>
@@ -14509,9 +13817,31 @@
           </a:p>
         </p:txBody>
       </p:sp>
+      <p:sp>
+        <p:nvSpPr>
+          <p:cNvPr id="5" name="Shape 3"/>
+          <p:cNvSpPr/>
+          <p:nvPr/>
+        </p:nvSpPr>
+        <p:spPr>
+          <a:xfrm>
+            <a:off x="952500" y="9391650"/>
+            <a:ext cx="1187797" cy="476250"/>
+          </a:xfrm>
+          <a:prstGeom prst="roundRect">
+            <a:avLst>
+              <a:gd name="adj" fmla="val 12000"/>
+            </a:avLst>
+          </a:prstGeom>
+          <a:solidFill>
+            <a:srgbClr val="FFFFFF"/>
+          </a:solidFill>
+          <a:ln/>
+        </p:spPr>
+      </p:sp>
       <p:pic>
         <p:nvPicPr>
-          <p:cNvPr id="5" name="Image 0" descr="preencoded.png">    </p:cNvPr>
+          <p:cNvPr id="6" name="Image 0" descr="preencoded.png">    </p:cNvPr>
           <p:cNvPicPr>
             <a:picLocks noChangeAspect="1"/>
           </p:cNvPicPr>
@@ -14525,8 +13855,8 @@
         </p:blipFill>
         <p:spPr>
           <a:xfrm>
-            <a:off x="952500" y="9448800"/>
-            <a:ext cx="534888" cy="419100"/>
+            <a:off x="1104900" y="9467850"/>
+            <a:ext cx="882997" cy="323850"/>
           </a:xfrm>
           <a:prstGeom prst="rect">
             <a:avLst/>
@@ -14535,99 +13865,7 @@
       </p:pic>
       <p:sp>
         <p:nvSpPr>
-          <p:cNvPr id="6" name="Text 3"/>
-          <p:cNvSpPr/>
-          <p:nvPr/>
-        </p:nvSpPr>
-        <p:spPr>
-          <a:xfrm>
-            <a:off x="1639788" y="9505950"/>
-            <a:ext cx="1988939" cy="342900"/>
-          </a:xfrm>
-          <a:prstGeom prst="rect">
-            <a:avLst/>
-          </a:prstGeom>
-          <a:noFill/>
-          <a:ln/>
-        </p:spPr>
-        <p:txBody>
-          <a:bodyPr wrap="square" lIns="25400" tIns="25400" rIns="25400" bIns="25400" rtlCol="0" anchor="t">
-            <a:normAutofit/>
-          </a:bodyPr>
-          <a:lstStyle/>
-          <a:p>
-            <a:pPr algn="l" indent="0" marL="0">
-              <a:lnSpc>
-                <a:spcPct val="139130"/>
-              </a:lnSpc>
-              <a:buNone/>
-            </a:pPr>
-            <a:r>
-              <a:rPr lang="en-US" sz="1500" b="1" dirty="0">
-                <a:solidFill>
-                  <a:srgbClr val="FFFFFF">
-                    <a:alpha val="65000"/>
-                  </a:srgbClr>
-                </a:solidFill>
-                <a:latin typeface="Arial" pitchFamily="34" charset="0"/>
-                <a:ea typeface="Arial" pitchFamily="34" charset="-122"/>
-                <a:cs typeface="Arial" pitchFamily="34" charset="-120"/>
-              </a:rPr>
-              <a:t>AFGP · Formazione AI</a:t>
-            </a:r>
-            <a:endParaRPr lang="en-US" sz="1500" dirty="0"/>
-          </a:p>
-        </p:txBody>
-      </p:sp>
-      <p:sp>
-        <p:nvSpPr>
-          <p:cNvPr id="7" name="Shape 4"/>
-          <p:cNvSpPr/>
-          <p:nvPr/>
-        </p:nvSpPr>
-        <p:spPr>
-          <a:xfrm>
-            <a:off x="15108585" y="8690670"/>
-            <a:ext cx="1845915" cy="910530"/>
-          </a:xfrm>
-          <a:prstGeom prst="roundRect">
-            <a:avLst>
-              <a:gd name="adj" fmla="val 6277"/>
-            </a:avLst>
-          </a:prstGeom>
-          <a:solidFill>
-            <a:srgbClr val="FFFFFF"/>
-          </a:solidFill>
-          <a:ln/>
-        </p:spPr>
-      </p:sp>
-      <p:pic>
-        <p:nvPicPr>
-          <p:cNvPr id="8" name="Image 1" descr="preencoded.png">    </p:cNvPr>
-          <p:cNvPicPr>
-            <a:picLocks noChangeAspect="1"/>
-          </p:cNvPicPr>
-          <p:nvPr/>
-        </p:nvPicPr>
-        <p:blipFill>
-          <a:blip r:embed="rId2"/>
-          <a:stretch>
-            <a:fillRect/>
-          </a:stretch>
-        </p:blipFill>
-        <p:spPr>
-          <a:xfrm>
-            <a:off x="15356235" y="8862120"/>
-            <a:ext cx="1350615" cy="495300"/>
-          </a:xfrm>
-          <a:prstGeom prst="rect">
-            <a:avLst/>
-          </a:prstGeom>
-        </p:spPr>
-      </p:pic>
-      <p:sp>
-        <p:nvSpPr>
-          <p:cNvPr id="9" name="Text 5"/>
+          <p:cNvPr id="7" name="Text 4"/>
           <p:cNvSpPr/>
           <p:nvPr/>
         </p:nvSpPr>
@@ -15239,8 +14477,8 @@
         </p:blipFill>
         <p:spPr>
           <a:xfrm>
-            <a:off x="952500" y="9572625"/>
-            <a:ext cx="364778" cy="285750"/>
+            <a:off x="952500" y="9544050"/>
+            <a:ext cx="882997" cy="323850"/>
           </a:xfrm>
           <a:prstGeom prst="rect">
             <a:avLst/>
@@ -15250,50 +14488,6 @@
       <p:sp>
         <p:nvSpPr>
           <p:cNvPr id="17" name="Text 14"/>
-          <p:cNvSpPr/>
-          <p:nvPr/>
-        </p:nvSpPr>
-        <p:spPr>
-          <a:xfrm>
-            <a:off x="1469678" y="9563100"/>
-            <a:ext cx="1988939" cy="342900"/>
-          </a:xfrm>
-          <a:prstGeom prst="rect">
-            <a:avLst/>
-          </a:prstGeom>
-          <a:noFill/>
-          <a:ln/>
-        </p:spPr>
-        <p:txBody>
-          <a:bodyPr wrap="square" lIns="25400" tIns="25400" rIns="25400" bIns="25400" rtlCol="0" anchor="t">
-            <a:normAutofit/>
-          </a:bodyPr>
-          <a:lstStyle/>
-          <a:p>
-            <a:pPr algn="l" indent="0" marL="0">
-              <a:lnSpc>
-                <a:spcPct val="139130"/>
-              </a:lnSpc>
-              <a:buNone/>
-            </a:pPr>
-            <a:r>
-              <a:rPr lang="en-US" sz="1500" b="1" dirty="0">
-                <a:solidFill>
-                  <a:srgbClr val="6B7280"/>
-                </a:solidFill>
-                <a:latin typeface="Arial" pitchFamily="34" charset="0"/>
-                <a:ea typeface="Arial" pitchFamily="34" charset="-122"/>
-                <a:cs typeface="Arial" pitchFamily="34" charset="-120"/>
-              </a:rPr>
-              <a:t>AFGP · Formazione AI</a:t>
-            </a:r>
-            <a:endParaRPr lang="en-US" sz="1500" dirty="0"/>
-          </a:p>
-        </p:txBody>
-      </p:sp>
-      <p:sp>
-        <p:nvSpPr>
-          <p:cNvPr id="18" name="Text 15"/>
           <p:cNvSpPr/>
           <p:nvPr/>
         </p:nvSpPr>
@@ -15933,8 +15127,8 @@
         </p:blipFill>
         <p:spPr>
           <a:xfrm>
-            <a:off x="952500" y="9572625"/>
-            <a:ext cx="364778" cy="285750"/>
+            <a:off x="952500" y="9544050"/>
+            <a:ext cx="882997" cy="323850"/>
           </a:xfrm>
           <a:prstGeom prst="rect">
             <a:avLst/>
@@ -15944,50 +15138,6 @@
       <p:sp>
         <p:nvSpPr>
           <p:cNvPr id="17" name="Text 14"/>
-          <p:cNvSpPr/>
-          <p:nvPr/>
-        </p:nvSpPr>
-        <p:spPr>
-          <a:xfrm>
-            <a:off x="1469678" y="9563100"/>
-            <a:ext cx="1988939" cy="342900"/>
-          </a:xfrm>
-          <a:prstGeom prst="rect">
-            <a:avLst/>
-          </a:prstGeom>
-          <a:noFill/>
-          <a:ln/>
-        </p:spPr>
-        <p:txBody>
-          <a:bodyPr wrap="square" lIns="25400" tIns="25400" rIns="25400" bIns="25400" rtlCol="0" anchor="t">
-            <a:normAutofit/>
-          </a:bodyPr>
-          <a:lstStyle/>
-          <a:p>
-            <a:pPr algn="l" indent="0" marL="0">
-              <a:lnSpc>
-                <a:spcPct val="139130"/>
-              </a:lnSpc>
-              <a:buNone/>
-            </a:pPr>
-            <a:r>
-              <a:rPr lang="en-US" sz="1500" b="1" dirty="0">
-                <a:solidFill>
-                  <a:srgbClr val="6B7280"/>
-                </a:solidFill>
-                <a:latin typeface="Arial" pitchFamily="34" charset="0"/>
-                <a:ea typeface="Arial" pitchFamily="34" charset="-122"/>
-                <a:cs typeface="Arial" pitchFamily="34" charset="-120"/>
-              </a:rPr>
-              <a:t>AFGP · Formazione AI</a:t>
-            </a:r>
-            <a:endParaRPr lang="en-US" sz="1500" dirty="0"/>
-          </a:p>
-        </p:txBody>
-      </p:sp>
-      <p:sp>
-        <p:nvSpPr>
-          <p:cNvPr id="18" name="Text 15"/>
           <p:cNvSpPr/>
           <p:nvPr/>
         </p:nvSpPr>
@@ -16561,8 +15711,8 @@
         </p:blipFill>
         <p:spPr>
           <a:xfrm>
-            <a:off x="952500" y="9572625"/>
-            <a:ext cx="364778" cy="285750"/>
+            <a:off x="952500" y="9544050"/>
+            <a:ext cx="882997" cy="323850"/>
           </a:xfrm>
           <a:prstGeom prst="rect">
             <a:avLst/>
@@ -16572,50 +15722,6 @@
       <p:sp>
         <p:nvSpPr>
           <p:cNvPr id="15" name="Text 12"/>
-          <p:cNvSpPr/>
-          <p:nvPr/>
-        </p:nvSpPr>
-        <p:spPr>
-          <a:xfrm>
-            <a:off x="1469678" y="9563100"/>
-            <a:ext cx="1988939" cy="342900"/>
-          </a:xfrm>
-          <a:prstGeom prst="rect">
-            <a:avLst/>
-          </a:prstGeom>
-          <a:noFill/>
-          <a:ln/>
-        </p:spPr>
-        <p:txBody>
-          <a:bodyPr wrap="square" lIns="25400" tIns="25400" rIns="25400" bIns="25400" rtlCol="0" anchor="t">
-            <a:normAutofit/>
-          </a:bodyPr>
-          <a:lstStyle/>
-          <a:p>
-            <a:pPr algn="l" indent="0" marL="0">
-              <a:lnSpc>
-                <a:spcPct val="139130"/>
-              </a:lnSpc>
-              <a:buNone/>
-            </a:pPr>
-            <a:r>
-              <a:rPr lang="en-US" sz="1500" b="1" dirty="0">
-                <a:solidFill>
-                  <a:srgbClr val="6B7280"/>
-                </a:solidFill>
-                <a:latin typeface="Arial" pitchFamily="34" charset="0"/>
-                <a:ea typeface="Arial" pitchFamily="34" charset="-122"/>
-                <a:cs typeface="Arial" pitchFamily="34" charset="-120"/>
-              </a:rPr>
-              <a:t>AFGP · Formazione AI</a:t>
-            </a:r>
-            <a:endParaRPr lang="en-US" sz="1500" dirty="0"/>
-          </a:p>
-        </p:txBody>
-      </p:sp>
-      <p:sp>
-        <p:nvSpPr>
-          <p:cNvPr id="16" name="Text 13"/>
           <p:cNvSpPr/>
           <p:nvPr/>
         </p:nvSpPr>
@@ -17255,8 +16361,8 @@
         </p:blipFill>
         <p:spPr>
           <a:xfrm>
-            <a:off x="952500" y="9572625"/>
-            <a:ext cx="364778" cy="285750"/>
+            <a:off x="952500" y="9544050"/>
+            <a:ext cx="882997" cy="323850"/>
           </a:xfrm>
           <a:prstGeom prst="rect">
             <a:avLst/>
@@ -17266,50 +16372,6 @@
       <p:sp>
         <p:nvSpPr>
           <p:cNvPr id="17" name="Text 14"/>
-          <p:cNvSpPr/>
-          <p:nvPr/>
-        </p:nvSpPr>
-        <p:spPr>
-          <a:xfrm>
-            <a:off x="1469678" y="9563100"/>
-            <a:ext cx="1988939" cy="342900"/>
-          </a:xfrm>
-          <a:prstGeom prst="rect">
-            <a:avLst/>
-          </a:prstGeom>
-          <a:noFill/>
-          <a:ln/>
-        </p:spPr>
-        <p:txBody>
-          <a:bodyPr wrap="square" lIns="25400" tIns="25400" rIns="25400" bIns="25400" rtlCol="0" anchor="t">
-            <a:normAutofit/>
-          </a:bodyPr>
-          <a:lstStyle/>
-          <a:p>
-            <a:pPr algn="l" indent="0" marL="0">
-              <a:lnSpc>
-                <a:spcPct val="139130"/>
-              </a:lnSpc>
-              <a:buNone/>
-            </a:pPr>
-            <a:r>
-              <a:rPr lang="en-US" sz="1500" b="1" dirty="0">
-                <a:solidFill>
-                  <a:srgbClr val="6B7280"/>
-                </a:solidFill>
-                <a:latin typeface="Arial" pitchFamily="34" charset="0"/>
-                <a:ea typeface="Arial" pitchFamily="34" charset="-122"/>
-                <a:cs typeface="Arial" pitchFamily="34" charset="-120"/>
-              </a:rPr>
-              <a:t>AFGP · Formazione AI</a:t>
-            </a:r>
-            <a:endParaRPr lang="en-US" sz="1500" dirty="0"/>
-          </a:p>
-        </p:txBody>
-      </p:sp>
-      <p:sp>
-        <p:nvSpPr>
-          <p:cNvPr id="18" name="Text 15"/>
           <p:cNvSpPr/>
           <p:nvPr/>
         </p:nvSpPr>
@@ -18345,8 +17407,8 @@
         </p:blipFill>
         <p:spPr>
           <a:xfrm>
-            <a:off x="952500" y="9572625"/>
-            <a:ext cx="364778" cy="285750"/>
+            <a:off x="952500" y="9544050"/>
+            <a:ext cx="882997" cy="323850"/>
           </a:xfrm>
           <a:prstGeom prst="rect">
             <a:avLst/>
@@ -18356,50 +17418,6 @@
       <p:sp>
         <p:nvSpPr>
           <p:cNvPr id="31" name="Text 28"/>
-          <p:cNvSpPr/>
-          <p:nvPr/>
-        </p:nvSpPr>
-        <p:spPr>
-          <a:xfrm>
-            <a:off x="1469678" y="9563100"/>
-            <a:ext cx="1988939" cy="342900"/>
-          </a:xfrm>
-          <a:prstGeom prst="rect">
-            <a:avLst/>
-          </a:prstGeom>
-          <a:noFill/>
-          <a:ln/>
-        </p:spPr>
-        <p:txBody>
-          <a:bodyPr wrap="square" lIns="25400" tIns="25400" rIns="25400" bIns="25400" rtlCol="0" anchor="t">
-            <a:normAutofit/>
-          </a:bodyPr>
-          <a:lstStyle/>
-          <a:p>
-            <a:pPr algn="l" indent="0" marL="0">
-              <a:lnSpc>
-                <a:spcPct val="139130"/>
-              </a:lnSpc>
-              <a:buNone/>
-            </a:pPr>
-            <a:r>
-              <a:rPr lang="en-US" sz="1500" b="1" dirty="0">
-                <a:solidFill>
-                  <a:srgbClr val="6B7280"/>
-                </a:solidFill>
-                <a:latin typeface="Arial" pitchFamily="34" charset="0"/>
-                <a:ea typeface="Arial" pitchFamily="34" charset="-122"/>
-                <a:cs typeface="Arial" pitchFamily="34" charset="-120"/>
-              </a:rPr>
-              <a:t>AFGP · Formazione AI</a:t>
-            </a:r>
-            <a:endParaRPr lang="en-US" sz="1500" dirty="0"/>
-          </a:p>
-        </p:txBody>
-      </p:sp>
-      <p:sp>
-        <p:nvSpPr>
-          <p:cNvPr id="32" name="Text 29"/>
           <p:cNvSpPr/>
           <p:nvPr/>
         </p:nvSpPr>
@@ -19063,8 +18081,8 @@
         </p:blipFill>
         <p:spPr>
           <a:xfrm>
-            <a:off x="952500" y="9572625"/>
-            <a:ext cx="364778" cy="285750"/>
+            <a:off x="952500" y="9544050"/>
+            <a:ext cx="882997" cy="323850"/>
           </a:xfrm>
           <a:prstGeom prst="rect">
             <a:avLst/>
@@ -19074,50 +18092,6 @@
       <p:sp>
         <p:nvSpPr>
           <p:cNvPr id="18" name="Text 14"/>
-          <p:cNvSpPr/>
-          <p:nvPr/>
-        </p:nvSpPr>
-        <p:spPr>
-          <a:xfrm>
-            <a:off x="1469678" y="9563100"/>
-            <a:ext cx="1988939" cy="342900"/>
-          </a:xfrm>
-          <a:prstGeom prst="rect">
-            <a:avLst/>
-          </a:prstGeom>
-          <a:noFill/>
-          <a:ln/>
-        </p:spPr>
-        <p:txBody>
-          <a:bodyPr wrap="square" lIns="25400" tIns="25400" rIns="25400" bIns="25400" rtlCol="0" anchor="t">
-            <a:normAutofit/>
-          </a:bodyPr>
-          <a:lstStyle/>
-          <a:p>
-            <a:pPr algn="l" indent="0" marL="0">
-              <a:lnSpc>
-                <a:spcPct val="139130"/>
-              </a:lnSpc>
-              <a:buNone/>
-            </a:pPr>
-            <a:r>
-              <a:rPr lang="en-US" sz="1500" b="1" dirty="0">
-                <a:solidFill>
-                  <a:srgbClr val="6B7280"/>
-                </a:solidFill>
-                <a:latin typeface="Arial" pitchFamily="34" charset="0"/>
-                <a:ea typeface="Arial" pitchFamily="34" charset="-122"/>
-                <a:cs typeface="Arial" pitchFamily="34" charset="-120"/>
-              </a:rPr>
-              <a:t>AFGP · Formazione AI</a:t>
-            </a:r>
-            <a:endParaRPr lang="en-US" sz="1500" dirty="0"/>
-          </a:p>
-        </p:txBody>
-      </p:sp>
-      <p:sp>
-        <p:nvSpPr>
-          <p:cNvPr id="19" name="Text 15"/>
           <p:cNvSpPr/>
           <p:nvPr/>
         </p:nvSpPr>
@@ -19781,8 +18755,8 @@
         </p:blipFill>
         <p:spPr>
           <a:xfrm>
-            <a:off x="952500" y="9572625"/>
-            <a:ext cx="364778" cy="285750"/>
+            <a:off x="952500" y="9544050"/>
+            <a:ext cx="882997" cy="323850"/>
           </a:xfrm>
           <a:prstGeom prst="rect">
             <a:avLst/>
@@ -19792,50 +18766,6 @@
       <p:sp>
         <p:nvSpPr>
           <p:cNvPr id="18" name="Text 14"/>
-          <p:cNvSpPr/>
-          <p:nvPr/>
-        </p:nvSpPr>
-        <p:spPr>
-          <a:xfrm>
-            <a:off x="1469678" y="9563100"/>
-            <a:ext cx="1988939" cy="342900"/>
-          </a:xfrm>
-          <a:prstGeom prst="rect">
-            <a:avLst/>
-          </a:prstGeom>
-          <a:noFill/>
-          <a:ln/>
-        </p:spPr>
-        <p:txBody>
-          <a:bodyPr wrap="square" lIns="25400" tIns="25400" rIns="25400" bIns="25400" rtlCol="0" anchor="t">
-            <a:normAutofit/>
-          </a:bodyPr>
-          <a:lstStyle/>
-          <a:p>
-            <a:pPr algn="l" indent="0" marL="0">
-              <a:lnSpc>
-                <a:spcPct val="139130"/>
-              </a:lnSpc>
-              <a:buNone/>
-            </a:pPr>
-            <a:r>
-              <a:rPr lang="en-US" sz="1500" b="1" dirty="0">
-                <a:solidFill>
-                  <a:srgbClr val="6B7280"/>
-                </a:solidFill>
-                <a:latin typeface="Arial" pitchFamily="34" charset="0"/>
-                <a:ea typeface="Arial" pitchFamily="34" charset="-122"/>
-                <a:cs typeface="Arial" pitchFamily="34" charset="-120"/>
-              </a:rPr>
-              <a:t>AFGP · Formazione AI</a:t>
-            </a:r>
-            <a:endParaRPr lang="en-US" sz="1500" dirty="0"/>
-          </a:p>
-        </p:txBody>
-      </p:sp>
-      <p:sp>
-        <p:nvSpPr>
-          <p:cNvPr id="19" name="Text 15"/>
           <p:cNvSpPr/>
           <p:nvPr/>
         </p:nvSpPr>
@@ -20499,8 +19429,8 @@
         </p:blipFill>
         <p:spPr>
           <a:xfrm>
-            <a:off x="952500" y="9572625"/>
-            <a:ext cx="364778" cy="285750"/>
+            <a:off x="952500" y="9544050"/>
+            <a:ext cx="882997" cy="323850"/>
           </a:xfrm>
           <a:prstGeom prst="rect">
             <a:avLst/>
@@ -20510,50 +19440,6 @@
       <p:sp>
         <p:nvSpPr>
           <p:cNvPr id="18" name="Text 14"/>
-          <p:cNvSpPr/>
-          <p:nvPr/>
-        </p:nvSpPr>
-        <p:spPr>
-          <a:xfrm>
-            <a:off x="1469678" y="9563100"/>
-            <a:ext cx="1988939" cy="342900"/>
-          </a:xfrm>
-          <a:prstGeom prst="rect">
-            <a:avLst/>
-          </a:prstGeom>
-          <a:noFill/>
-          <a:ln/>
-        </p:spPr>
-        <p:txBody>
-          <a:bodyPr wrap="square" lIns="25400" tIns="25400" rIns="25400" bIns="25400" rtlCol="0" anchor="t">
-            <a:normAutofit/>
-          </a:bodyPr>
-          <a:lstStyle/>
-          <a:p>
-            <a:pPr algn="l" indent="0" marL="0">
-              <a:lnSpc>
-                <a:spcPct val="139130"/>
-              </a:lnSpc>
-              <a:buNone/>
-            </a:pPr>
-            <a:r>
-              <a:rPr lang="en-US" sz="1500" b="1" dirty="0">
-                <a:solidFill>
-                  <a:srgbClr val="6B7280"/>
-                </a:solidFill>
-                <a:latin typeface="Arial" pitchFamily="34" charset="0"/>
-                <a:ea typeface="Arial" pitchFamily="34" charset="-122"/>
-                <a:cs typeface="Arial" pitchFamily="34" charset="-120"/>
-              </a:rPr>
-              <a:t>AFGP · Formazione AI</a:t>
-            </a:r>
-            <a:endParaRPr lang="en-US" sz="1500" dirty="0"/>
-          </a:p>
-        </p:txBody>
-      </p:sp>
-      <p:sp>
-        <p:nvSpPr>
-          <p:cNvPr id="19" name="Text 15"/>
           <p:cNvSpPr/>
           <p:nvPr/>
         </p:nvSpPr>
@@ -21749,8 +20635,8 @@
         </p:blipFill>
         <p:spPr>
           <a:xfrm>
-            <a:off x="952500" y="9572625"/>
-            <a:ext cx="364778" cy="285750"/>
+            <a:off x="952500" y="9544050"/>
+            <a:ext cx="882997" cy="323850"/>
           </a:xfrm>
           <a:prstGeom prst="rect">
             <a:avLst/>
@@ -21760,50 +20646,6 @@
       <p:sp>
         <p:nvSpPr>
           <p:cNvPr id="36" name="Text 30"/>
-          <p:cNvSpPr/>
-          <p:nvPr/>
-        </p:nvSpPr>
-        <p:spPr>
-          <a:xfrm>
-            <a:off x="1469678" y="9563100"/>
-            <a:ext cx="1988939" cy="342900"/>
-          </a:xfrm>
-          <a:prstGeom prst="rect">
-            <a:avLst/>
-          </a:prstGeom>
-          <a:noFill/>
-          <a:ln/>
-        </p:spPr>
-        <p:txBody>
-          <a:bodyPr wrap="square" lIns="25400" tIns="25400" rIns="25400" bIns="25400" rtlCol="0" anchor="t">
-            <a:normAutofit/>
-          </a:bodyPr>
-          <a:lstStyle/>
-          <a:p>
-            <a:pPr algn="l" indent="0" marL="0">
-              <a:lnSpc>
-                <a:spcPct val="139130"/>
-              </a:lnSpc>
-              <a:buNone/>
-            </a:pPr>
-            <a:r>
-              <a:rPr lang="en-US" sz="1500" b="1" dirty="0">
-                <a:solidFill>
-                  <a:srgbClr val="6B7280"/>
-                </a:solidFill>
-                <a:latin typeface="Arial" pitchFamily="34" charset="0"/>
-                <a:ea typeface="Arial" pitchFamily="34" charset="-122"/>
-                <a:cs typeface="Arial" pitchFamily="34" charset="-120"/>
-              </a:rPr>
-              <a:t>AFGP · Formazione AI</a:t>
-            </a:r>
-            <a:endParaRPr lang="en-US" sz="1500" dirty="0"/>
-          </a:p>
-        </p:txBody>
-      </p:sp>
-      <p:sp>
-        <p:nvSpPr>
-          <p:cNvPr id="37" name="Text 31"/>
           <p:cNvSpPr/>
           <p:nvPr/>
         </p:nvSpPr>
@@ -22311,8 +21153,8 @@
         </p:blipFill>
         <p:spPr>
           <a:xfrm>
-            <a:off x="952500" y="9572625"/>
-            <a:ext cx="364778" cy="285750"/>
+            <a:off x="952500" y="9544050"/>
+            <a:ext cx="882997" cy="323850"/>
           </a:xfrm>
           <a:prstGeom prst="rect">
             <a:avLst/>
@@ -22322,50 +21164,6 @@
       <p:sp>
         <p:nvSpPr>
           <p:cNvPr id="14" name="Text 11"/>
-          <p:cNvSpPr/>
-          <p:nvPr/>
-        </p:nvSpPr>
-        <p:spPr>
-          <a:xfrm>
-            <a:off x="1469678" y="9563100"/>
-            <a:ext cx="1988939" cy="342900"/>
-          </a:xfrm>
-          <a:prstGeom prst="rect">
-            <a:avLst/>
-          </a:prstGeom>
-          <a:noFill/>
-          <a:ln/>
-        </p:spPr>
-        <p:txBody>
-          <a:bodyPr wrap="square" lIns="25400" tIns="25400" rIns="25400" bIns="25400" rtlCol="0" anchor="t">
-            <a:normAutofit/>
-          </a:bodyPr>
-          <a:lstStyle/>
-          <a:p>
-            <a:pPr algn="l" indent="0" marL="0">
-              <a:lnSpc>
-                <a:spcPct val="139130"/>
-              </a:lnSpc>
-              <a:buNone/>
-            </a:pPr>
-            <a:r>
-              <a:rPr lang="en-US" sz="1500" b="1" dirty="0">
-                <a:solidFill>
-                  <a:srgbClr val="6B7280"/>
-                </a:solidFill>
-                <a:latin typeface="Arial" pitchFamily="34" charset="0"/>
-                <a:ea typeface="Arial" pitchFamily="34" charset="-122"/>
-                <a:cs typeface="Arial" pitchFamily="34" charset="-120"/>
-              </a:rPr>
-              <a:t>AFGP · Formazione AI</a:t>
-            </a:r>
-            <a:endParaRPr lang="en-US" sz="1500" dirty="0"/>
-          </a:p>
-        </p:txBody>
-      </p:sp>
-      <p:sp>
-        <p:nvSpPr>
-          <p:cNvPr id="15" name="Text 12"/>
           <p:cNvSpPr/>
           <p:nvPr/>
         </p:nvSpPr>
@@ -22847,8 +21645,8 @@
         </p:blipFill>
         <p:spPr>
           <a:xfrm>
-            <a:off x="952500" y="9572625"/>
-            <a:ext cx="364778" cy="285750"/>
+            <a:off x="952500" y="9544050"/>
+            <a:ext cx="882997" cy="323850"/>
           </a:xfrm>
           <a:prstGeom prst="rect">
             <a:avLst/>
@@ -22858,50 +21656,6 @@
       <p:sp>
         <p:nvSpPr>
           <p:cNvPr id="14" name="Text 11"/>
-          <p:cNvSpPr/>
-          <p:nvPr/>
-        </p:nvSpPr>
-        <p:spPr>
-          <a:xfrm>
-            <a:off x="1469678" y="9563100"/>
-            <a:ext cx="1988939" cy="342900"/>
-          </a:xfrm>
-          <a:prstGeom prst="rect">
-            <a:avLst/>
-          </a:prstGeom>
-          <a:noFill/>
-          <a:ln/>
-        </p:spPr>
-        <p:txBody>
-          <a:bodyPr wrap="square" lIns="25400" tIns="25400" rIns="25400" bIns="25400" rtlCol="0" anchor="t">
-            <a:normAutofit/>
-          </a:bodyPr>
-          <a:lstStyle/>
-          <a:p>
-            <a:pPr algn="l" indent="0" marL="0">
-              <a:lnSpc>
-                <a:spcPct val="139130"/>
-              </a:lnSpc>
-              <a:buNone/>
-            </a:pPr>
-            <a:r>
-              <a:rPr lang="en-US" sz="1500" b="1" dirty="0">
-                <a:solidFill>
-                  <a:srgbClr val="6B7280"/>
-                </a:solidFill>
-                <a:latin typeface="Arial" pitchFamily="34" charset="0"/>
-                <a:ea typeface="Arial" pitchFamily="34" charset="-122"/>
-                <a:cs typeface="Arial" pitchFamily="34" charset="-120"/>
-              </a:rPr>
-              <a:t>AFGP · Formazione AI</a:t>
-            </a:r>
-            <a:endParaRPr lang="en-US" sz="1500" dirty="0"/>
-          </a:p>
-        </p:txBody>
-      </p:sp>
-      <p:sp>
-        <p:nvSpPr>
-          <p:cNvPr id="15" name="Text 12"/>
           <p:cNvSpPr/>
           <p:nvPr/>
         </p:nvSpPr>
@@ -23391,8 +22145,8 @@
         </p:blipFill>
         <p:spPr>
           <a:xfrm>
-            <a:off x="952500" y="9572625"/>
-            <a:ext cx="364778" cy="285750"/>
+            <a:off x="952500" y="9544050"/>
+            <a:ext cx="882997" cy="323850"/>
           </a:xfrm>
           <a:prstGeom prst="rect">
             <a:avLst/>
@@ -23402,50 +22156,6 @@
       <p:sp>
         <p:nvSpPr>
           <p:cNvPr id="13" name="Text 10"/>
-          <p:cNvSpPr/>
-          <p:nvPr/>
-        </p:nvSpPr>
-        <p:spPr>
-          <a:xfrm>
-            <a:off x="1469678" y="9563100"/>
-            <a:ext cx="1988939" cy="342900"/>
-          </a:xfrm>
-          <a:prstGeom prst="rect">
-            <a:avLst/>
-          </a:prstGeom>
-          <a:noFill/>
-          <a:ln/>
-        </p:spPr>
-        <p:txBody>
-          <a:bodyPr wrap="square" lIns="25400" tIns="25400" rIns="25400" bIns="25400" rtlCol="0" anchor="t">
-            <a:normAutofit/>
-          </a:bodyPr>
-          <a:lstStyle/>
-          <a:p>
-            <a:pPr algn="l" indent="0" marL="0">
-              <a:lnSpc>
-                <a:spcPct val="139130"/>
-              </a:lnSpc>
-              <a:buNone/>
-            </a:pPr>
-            <a:r>
-              <a:rPr lang="en-US" sz="1500" b="1" dirty="0">
-                <a:solidFill>
-                  <a:srgbClr val="6B7280"/>
-                </a:solidFill>
-                <a:latin typeface="Arial" pitchFamily="34" charset="0"/>
-                <a:ea typeface="Arial" pitchFamily="34" charset="-122"/>
-                <a:cs typeface="Arial" pitchFamily="34" charset="-120"/>
-              </a:rPr>
-              <a:t>AFGP · Formazione AI</a:t>
-            </a:r>
-            <a:endParaRPr lang="en-US" sz="1500" dirty="0"/>
-          </a:p>
-        </p:txBody>
-      </p:sp>
-      <p:sp>
-        <p:nvSpPr>
-          <p:cNvPr id="14" name="Text 11"/>
           <p:cNvSpPr/>
           <p:nvPr/>
         </p:nvSpPr>
@@ -24733,8 +23443,8 @@
         </p:blipFill>
         <p:spPr>
           <a:xfrm>
-            <a:off x="952500" y="9572625"/>
-            <a:ext cx="364778" cy="285750"/>
+            <a:off x="952500" y="9544050"/>
+            <a:ext cx="882997" cy="323850"/>
           </a:xfrm>
           <a:prstGeom prst="rect">
             <a:avLst/>
@@ -24744,50 +23454,6 @@
       <p:sp>
         <p:nvSpPr>
           <p:cNvPr id="40" name="Text 37"/>
-          <p:cNvSpPr/>
-          <p:nvPr/>
-        </p:nvSpPr>
-        <p:spPr>
-          <a:xfrm>
-            <a:off x="1469678" y="9563100"/>
-            <a:ext cx="1988939" cy="342900"/>
-          </a:xfrm>
-          <a:prstGeom prst="rect">
-            <a:avLst/>
-          </a:prstGeom>
-          <a:noFill/>
-          <a:ln/>
-        </p:spPr>
-        <p:txBody>
-          <a:bodyPr wrap="square" lIns="25400" tIns="25400" rIns="25400" bIns="25400" rtlCol="0" anchor="t">
-            <a:normAutofit/>
-          </a:bodyPr>
-          <a:lstStyle/>
-          <a:p>
-            <a:pPr algn="l" indent="0" marL="0">
-              <a:lnSpc>
-                <a:spcPct val="139130"/>
-              </a:lnSpc>
-              <a:buNone/>
-            </a:pPr>
-            <a:r>
-              <a:rPr lang="en-US" sz="1500" b="1" dirty="0">
-                <a:solidFill>
-                  <a:srgbClr val="6B7280"/>
-                </a:solidFill>
-                <a:latin typeface="Arial" pitchFamily="34" charset="0"/>
-                <a:ea typeface="Arial" pitchFamily="34" charset="-122"/>
-                <a:cs typeface="Arial" pitchFamily="34" charset="-120"/>
-              </a:rPr>
-              <a:t>AFGP · Formazione AI</a:t>
-            </a:r>
-            <a:endParaRPr lang="en-US" sz="1500" dirty="0"/>
-          </a:p>
-        </p:txBody>
-      </p:sp>
-      <p:sp>
-        <p:nvSpPr>
-          <p:cNvPr id="41" name="Text 38"/>
           <p:cNvSpPr/>
           <p:nvPr/>
         </p:nvSpPr>
@@ -24995,9 +23661,31 @@
           </a:p>
         </p:txBody>
       </p:sp>
+      <p:sp>
+        <p:nvSpPr>
+          <p:cNvPr id="5" name="Shape 3"/>
+          <p:cNvSpPr/>
+          <p:nvPr/>
+        </p:nvSpPr>
+        <p:spPr>
+          <a:xfrm>
+            <a:off x="952500" y="9429750"/>
+            <a:ext cx="1083915" cy="438150"/>
+          </a:xfrm>
+          <a:prstGeom prst="roundRect">
+            <a:avLst>
+              <a:gd name="adj" fmla="val 13043"/>
+            </a:avLst>
+          </a:prstGeom>
+          <a:solidFill>
+            <a:srgbClr val="FFFFFF"/>
+          </a:solidFill>
+          <a:ln/>
+        </p:spPr>
+      </p:sp>
       <p:pic>
         <p:nvPicPr>
-          <p:cNvPr id="5" name="Image 0" descr="preencoded.png">    </p:cNvPr>
+          <p:cNvPr id="6" name="Image 0" descr="preencoded.png">    </p:cNvPr>
           <p:cNvPicPr>
             <a:picLocks noChangeAspect="1"/>
           </p:cNvPicPr>
@@ -25011,60 +23699,14 @@
         </p:blipFill>
         <p:spPr>
           <a:xfrm>
-            <a:off x="952500" y="9486900"/>
-            <a:ext cx="486370" cy="381000"/>
+            <a:off x="1104900" y="9505950"/>
+            <a:ext cx="779115" cy="285750"/>
           </a:xfrm>
           <a:prstGeom prst="rect">
             <a:avLst/>
           </a:prstGeom>
         </p:spPr>
       </p:pic>
-      <p:sp>
-        <p:nvSpPr>
-          <p:cNvPr id="6" name="Text 3"/>
-          <p:cNvSpPr/>
-          <p:nvPr/>
-        </p:nvSpPr>
-        <p:spPr>
-          <a:xfrm>
-            <a:off x="1591270" y="9525000"/>
-            <a:ext cx="1988939" cy="342900"/>
-          </a:xfrm>
-          <a:prstGeom prst="rect">
-            <a:avLst/>
-          </a:prstGeom>
-          <a:noFill/>
-          <a:ln/>
-        </p:spPr>
-        <p:txBody>
-          <a:bodyPr wrap="square" lIns="25400" tIns="25400" rIns="25400" bIns="25400" rtlCol="0" anchor="t">
-            <a:normAutofit/>
-          </a:bodyPr>
-          <a:lstStyle/>
-          <a:p>
-            <a:pPr algn="l" indent="0" marL="0">
-              <a:lnSpc>
-                <a:spcPct val="139130"/>
-              </a:lnSpc>
-              <a:buNone/>
-            </a:pPr>
-            <a:r>
-              <a:rPr lang="en-US" sz="1500" b="1" dirty="0">
-                <a:solidFill>
-                  <a:srgbClr val="FFFFFF">
-                    <a:alpha val="65000"/>
-                  </a:srgbClr>
-                </a:solidFill>
-                <a:latin typeface="Arial" pitchFamily="34" charset="0"/>
-                <a:ea typeface="Arial" pitchFamily="34" charset="-122"/>
-                <a:cs typeface="Arial" pitchFamily="34" charset="-120"/>
-              </a:rPr>
-              <a:t>AFGP · Formazione AI</a:t>
-            </a:r>
-            <a:endParaRPr lang="en-US" sz="1500" dirty="0"/>
-          </a:p>
-        </p:txBody>
-      </p:sp>
       <p:sp>
         <p:nvSpPr>
           <p:cNvPr id="7" name="Text 4"/>
@@ -25863,8 +24505,8 @@
         </p:blipFill>
         <p:spPr>
           <a:xfrm>
-            <a:off x="952500" y="9572625"/>
-            <a:ext cx="364778" cy="285750"/>
+            <a:off x="952500" y="9544050"/>
+            <a:ext cx="882997" cy="323850"/>
           </a:xfrm>
           <a:prstGeom prst="rect">
             <a:avLst/>
@@ -25874,50 +24516,6 @@
       <p:sp>
         <p:nvSpPr>
           <p:cNvPr id="21" name="Text 18"/>
-          <p:cNvSpPr/>
-          <p:nvPr/>
-        </p:nvSpPr>
-        <p:spPr>
-          <a:xfrm>
-            <a:off x="1469678" y="9563100"/>
-            <a:ext cx="1988939" cy="342900"/>
-          </a:xfrm>
-          <a:prstGeom prst="rect">
-            <a:avLst/>
-          </a:prstGeom>
-          <a:noFill/>
-          <a:ln/>
-        </p:spPr>
-        <p:txBody>
-          <a:bodyPr wrap="square" lIns="25400" tIns="25400" rIns="25400" bIns="25400" rtlCol="0" anchor="t">
-            <a:normAutofit/>
-          </a:bodyPr>
-          <a:lstStyle/>
-          <a:p>
-            <a:pPr algn="l" indent="0" marL="0">
-              <a:lnSpc>
-                <a:spcPct val="139130"/>
-              </a:lnSpc>
-              <a:buNone/>
-            </a:pPr>
-            <a:r>
-              <a:rPr lang="en-US" sz="1500" b="1" dirty="0">
-                <a:solidFill>
-                  <a:srgbClr val="6B7280"/>
-                </a:solidFill>
-                <a:latin typeface="Arial" pitchFamily="34" charset="0"/>
-                <a:ea typeface="Arial" pitchFamily="34" charset="-122"/>
-                <a:cs typeface="Arial" pitchFamily="34" charset="-120"/>
-              </a:rPr>
-              <a:t>AFGP · Formazione AI</a:t>
-            </a:r>
-            <a:endParaRPr lang="en-US" sz="1500" dirty="0"/>
-          </a:p>
-        </p:txBody>
-      </p:sp>
-      <p:sp>
-        <p:nvSpPr>
-          <p:cNvPr id="22" name="Text 19"/>
           <p:cNvSpPr/>
           <p:nvPr/>
         </p:nvSpPr>
